--- a/presentations/PL_L02_InstructionWorkshop_Lesson.pptx
+++ b/presentations/PL_L02_InstructionWorkshop_Lesson.pptx
@@ -2,30 +2,30 @@
 <file path=ppt/presentation.xml><?xml version="1.0" encoding="utf-8"?>
 <p:presentation xmlns:p="http://schemas.openxmlformats.org/presentationml/2006/main">
   <p:sldMasterIdLst>
-    <p:sldMasterId xmlns:r="http://schemas.openxmlformats.org/officeDocument/2006/relationships" id="2147483648" r:id="Rbd36ccad3caf4982"/>
+    <p:sldMasterId xmlns:r="http://schemas.openxmlformats.org/officeDocument/2006/relationships" id="2147483648" r:id="R6df97ec5fcad4c28"/>
   </p:sldMasterIdLst>
   <p:notesMasterIdLst>
-    <p:notesMasterId xmlns:r="http://schemas.openxmlformats.org/officeDocument/2006/relationships" r:id="R9fcdfc33879c4ce3"/>
+    <p:notesMasterId xmlns:r="http://schemas.openxmlformats.org/officeDocument/2006/relationships" r:id="R28088cd258c24056"/>
   </p:notesMasterIdLst>
   <p:sldIdLst>
-    <p:sldId xmlns:r="http://schemas.openxmlformats.org/officeDocument/2006/relationships" id="256" r:id="R366004c3a8e04ad1"/>
-    <p:sldId xmlns:r="http://schemas.openxmlformats.org/officeDocument/2006/relationships" id="257" r:id="R2b1eeae9c062465b"/>
-    <p:sldId xmlns:r="http://schemas.openxmlformats.org/officeDocument/2006/relationships" id="258" r:id="Rc66ab8f1834e4696"/>
-    <p:sldId xmlns:r="http://schemas.openxmlformats.org/officeDocument/2006/relationships" id="259" r:id="R233736aadfb44686"/>
-    <p:sldId xmlns:r="http://schemas.openxmlformats.org/officeDocument/2006/relationships" id="260" r:id="R9f35a8a48db64316"/>
-    <p:sldId xmlns:r="http://schemas.openxmlformats.org/officeDocument/2006/relationships" id="261" r:id="R15e5e0aa3cbb4d0a"/>
-    <p:sldId xmlns:r="http://schemas.openxmlformats.org/officeDocument/2006/relationships" id="262" r:id="R97bf769d53df4b07"/>
-    <p:sldId xmlns:r="http://schemas.openxmlformats.org/officeDocument/2006/relationships" id="263" r:id="R1daa705b90f64ffd"/>
-    <p:sldId xmlns:r="http://schemas.openxmlformats.org/officeDocument/2006/relationships" id="264" r:id="Rbe4d0d097b7c44b0"/>
-    <p:sldId xmlns:r="http://schemas.openxmlformats.org/officeDocument/2006/relationships" id="265" r:id="R2580a010c7884a35"/>
-    <p:sldId xmlns:r="http://schemas.openxmlformats.org/officeDocument/2006/relationships" id="266" r:id="Rde8f85ce8f6a4bcb"/>
-    <p:sldId xmlns:r="http://schemas.openxmlformats.org/officeDocument/2006/relationships" id="267" r:id="R639657879fa241d1"/>
-    <p:sldId xmlns:r="http://schemas.openxmlformats.org/officeDocument/2006/relationships" id="268" r:id="R0d46a961dbc54105"/>
-    <p:sldId xmlns:r="http://schemas.openxmlformats.org/officeDocument/2006/relationships" id="269" r:id="R617e0cee22504f27"/>
-    <p:sldId xmlns:r="http://schemas.openxmlformats.org/officeDocument/2006/relationships" id="270" r:id="R83ca9c0684d147f4"/>
-    <p:sldId xmlns:r="http://schemas.openxmlformats.org/officeDocument/2006/relationships" id="271" r:id="R3c04d976361e4d05"/>
-    <p:sldId xmlns:r="http://schemas.openxmlformats.org/officeDocument/2006/relationships" id="272" r:id="R72c97e797e4346d3"/>
-    <p:sldId xmlns:r="http://schemas.openxmlformats.org/officeDocument/2006/relationships" id="273" r:id="R7cfdd0f971964be9"/>
+    <p:sldId xmlns:r="http://schemas.openxmlformats.org/officeDocument/2006/relationships" id="256" r:id="R37bc61c7e5c74f23"/>
+    <p:sldId xmlns:r="http://schemas.openxmlformats.org/officeDocument/2006/relationships" id="257" r:id="R07dcaca22fbf4adf"/>
+    <p:sldId xmlns:r="http://schemas.openxmlformats.org/officeDocument/2006/relationships" id="258" r:id="R38dae5a33b9247c4"/>
+    <p:sldId xmlns:r="http://schemas.openxmlformats.org/officeDocument/2006/relationships" id="259" r:id="R03bd35c032bf4911"/>
+    <p:sldId xmlns:r="http://schemas.openxmlformats.org/officeDocument/2006/relationships" id="260" r:id="R702f2ad669444aa6"/>
+    <p:sldId xmlns:r="http://schemas.openxmlformats.org/officeDocument/2006/relationships" id="261" r:id="R4a87516b945f469f"/>
+    <p:sldId xmlns:r="http://schemas.openxmlformats.org/officeDocument/2006/relationships" id="262" r:id="Rb33ef6cf09a14c66"/>
+    <p:sldId xmlns:r="http://schemas.openxmlformats.org/officeDocument/2006/relationships" id="263" r:id="Rdcdb7393c64b4ce0"/>
+    <p:sldId xmlns:r="http://schemas.openxmlformats.org/officeDocument/2006/relationships" id="264" r:id="R1ea551553f164fa6"/>
+    <p:sldId xmlns:r="http://schemas.openxmlformats.org/officeDocument/2006/relationships" id="265" r:id="R509653570e3b44da"/>
+    <p:sldId xmlns:r="http://schemas.openxmlformats.org/officeDocument/2006/relationships" id="266" r:id="Rb3a1fcc595864632"/>
+    <p:sldId xmlns:r="http://schemas.openxmlformats.org/officeDocument/2006/relationships" id="267" r:id="R64dbbb1a793d4320"/>
+    <p:sldId xmlns:r="http://schemas.openxmlformats.org/officeDocument/2006/relationships" id="268" r:id="R7b9b2eb8f2b547ea"/>
+    <p:sldId xmlns:r="http://schemas.openxmlformats.org/officeDocument/2006/relationships" id="269" r:id="R1c5594b44d9f44f1"/>
+    <p:sldId xmlns:r="http://schemas.openxmlformats.org/officeDocument/2006/relationships" id="270" r:id="R19a25882ccbd4032"/>
+    <p:sldId xmlns:r="http://schemas.openxmlformats.org/officeDocument/2006/relationships" id="271" r:id="R6a66a934dc814603"/>
+    <p:sldId xmlns:r="http://schemas.openxmlformats.org/officeDocument/2006/relationships" id="272" r:id="Rd0d7f99c4e024842"/>
+    <p:sldId xmlns:r="http://schemas.openxmlformats.org/officeDocument/2006/relationships" id="273" r:id="R527a1fc9acab4a8c"/>
   </p:sldIdLst>
   <p:sldSz cx="12192000" cy="6858000"/>
   <p:notesSz cx="6858000" cy="9144000"/>
@@ -459,7 +459,7 @@
           <a:lstStyle xmlns:a="http://schemas.openxmlformats.org/drawingml/2006/main"/>
           <a:p xmlns:a="http://schemas.openxmlformats.org/drawingml/2006/main">
             <a:r>
-              <a:t>Revise360 original lesson content. Teaching examples support OCR J277 Topic 2.5. The low-level instruction model is explanatory enrichment, not an additional required instruction set.</a:t>
+              <a:t>Revise360 original lesson content. Teaching examples support OCR J277 Topic 2.5. Scope: OCR J277 specification v3.1, May 2026, printed page 21, sections 2.5.1 and 2.5.2. https://www.ocr.org.uk/images/558027-specification-gcse-computer-science-j277.pdf</a:t>
             </a:r>
           </a:p>
         </p:txBody>
@@ -529,7 +529,7 @@
           <a:lstStyle xmlns:a="http://schemas.openxmlformats.org/drawingml/2006/main"/>
           <a:p xmlns:a="http://schemas.openxmlformats.org/drawingml/2006/main">
             <a:r>
-              <a:t>Revise360 original lesson content. Teaching examples support OCR J277 Topic 2.5. The low-level instruction model is explanatory enrichment, not an additional required instruction set.</a:t>
+              <a:t>Revise360 original lesson content. Teaching examples support OCR J277 Topic 2.5. Scope: OCR J277 specification v3.1, May 2026, printed page 21, sections 2.5.1 and 2.5.2. https://www.ocr.org.uk/images/558027-specification-gcse-computer-science-j277.pdf</a:t>
             </a:r>
           </a:p>
         </p:txBody>
@@ -599,7 +599,7 @@
           <a:lstStyle xmlns:a="http://schemas.openxmlformats.org/drawingml/2006/main"/>
           <a:p xmlns:a="http://schemas.openxmlformats.org/drawingml/2006/main">
             <a:r>
-              <a:t>Revise360 original lesson content. Teaching examples support OCR J277 Topic 2.5. The low-level instruction model is explanatory enrichment, not an additional required instruction set.</a:t>
+              <a:t>Revise360 original lesson content. Teaching examples support OCR J277 Topic 2.5. Scope: OCR J277 specification v3.1, May 2026, printed page 21, sections 2.5.1 and 2.5.2. https://www.ocr.org.uk/images/558027-specification-gcse-computer-science-j277.pdf</a:t>
             </a:r>
           </a:p>
         </p:txBody>
@@ -669,7 +669,7 @@
           <a:lstStyle xmlns:a="http://schemas.openxmlformats.org/drawingml/2006/main"/>
           <a:p xmlns:a="http://schemas.openxmlformats.org/drawingml/2006/main">
             <a:r>
-              <a:t>Revise360 original lesson content. Teaching examples support OCR J277 Topic 2.5. The low-level instruction model is explanatory enrichment, not an additional required instruction set.</a:t>
+              <a:t>Revise360 original lesson content. Teaching examples support OCR J277 Topic 2.5. Scope: OCR J277 specification v3.1, May 2026, printed page 21, sections 2.5.1 and 2.5.2. https://www.ocr.org.uk/images/558027-specification-gcse-computer-science-j277.pdf</a:t>
             </a:r>
           </a:p>
         </p:txBody>
@@ -739,7 +739,7 @@
           <a:lstStyle xmlns:a="http://schemas.openxmlformats.org/drawingml/2006/main"/>
           <a:p xmlns:a="http://schemas.openxmlformats.org/drawingml/2006/main">
             <a:r>
-              <a:t>Revise360 original lesson content. Teaching examples support OCR J277 Topic 2.5. The low-level instruction model is explanatory enrichment, not an additional required instruction set.</a:t>
+              <a:t>Revise360 original lesson content. Teaching examples support OCR J277 Topic 2.5. Scope: OCR J277 specification v3.1, May 2026, printed page 21, sections 2.5.1 and 2.5.2. https://www.ocr.org.uk/images/558027-specification-gcse-computer-science-j277.pdf</a:t>
             </a:r>
           </a:p>
         </p:txBody>
@@ -809,7 +809,7 @@
           <a:lstStyle xmlns:a="http://schemas.openxmlformats.org/drawingml/2006/main"/>
           <a:p xmlns:a="http://schemas.openxmlformats.org/drawingml/2006/main">
             <a:r>
-              <a:t>Revise360 original lesson content. Teaching examples support OCR J277 Topic 2.5. The low-level instruction model is explanatory enrichment, not an additional required instruction set.</a:t>
+              <a:t>Revise360 original lesson content. Teaching examples support OCR J277 Topic 2.5. Scope: OCR J277 specification v3.1, May 2026, printed page 21, sections 2.5.1 and 2.5.2. https://www.ocr.org.uk/images/558027-specification-gcse-computer-science-j277.pdf</a:t>
             </a:r>
           </a:p>
         </p:txBody>
@@ -879,7 +879,7 @@
           <a:lstStyle xmlns:a="http://schemas.openxmlformats.org/drawingml/2006/main"/>
           <a:p xmlns:a="http://schemas.openxmlformats.org/drawingml/2006/main">
             <a:r>
-              <a:t>Revise360 original lesson content. Teaching examples support OCR J277 Topic 2.5. The low-level instruction model is explanatory enrichment, not an additional required instruction set.</a:t>
+              <a:t>Revise360 original lesson content. Teaching examples support OCR J277 Topic 2.5. Scope: OCR J277 specification v3.1, May 2026, printed page 21, sections 2.5.1 and 2.5.2. https://www.ocr.org.uk/images/558027-specification-gcse-computer-science-j277.pdf</a:t>
             </a:r>
           </a:p>
         </p:txBody>
@@ -949,7 +949,7 @@
           <a:lstStyle xmlns:a="http://schemas.openxmlformats.org/drawingml/2006/main"/>
           <a:p xmlns:a="http://schemas.openxmlformats.org/drawingml/2006/main">
             <a:r>
-              <a:t>Revise360 original lesson content. Teaching examples support OCR J277 Topic 2.5. The low-level instruction model is explanatory enrichment, not an additional required instruction set.</a:t>
+              <a:t>Revise360 original lesson content. Teaching examples support OCR J277 Topic 2.5. Scope: OCR J277 specification v3.1, May 2026, printed page 21, sections 2.5.1 and 2.5.2. https://www.ocr.org.uk/images/558027-specification-gcse-computer-science-j277.pdf</a:t>
             </a:r>
           </a:p>
         </p:txBody>
@@ -1019,7 +1019,7 @@
           <a:lstStyle xmlns:a="http://schemas.openxmlformats.org/drawingml/2006/main"/>
           <a:p xmlns:a="http://schemas.openxmlformats.org/drawingml/2006/main">
             <a:r>
-              <a:t>Revise360 original lesson content. Teaching examples support OCR J277 Topic 2.5. The low-level instruction model is explanatory enrichment, not an additional required instruction set.</a:t>
+              <a:t>Revise360 original lesson content. Teaching examples support OCR J277 Topic 2.5. Scope: OCR J277 specification v3.1, May 2026, printed page 21, sections 2.5.1 and 2.5.2. https://www.ocr.org.uk/images/558027-specification-gcse-computer-science-j277.pdf</a:t>
             </a:r>
           </a:p>
         </p:txBody>
@@ -1089,7 +1089,7 @@
           <a:lstStyle xmlns:a="http://schemas.openxmlformats.org/drawingml/2006/main"/>
           <a:p xmlns:a="http://schemas.openxmlformats.org/drawingml/2006/main">
             <a:r>
-              <a:t>Revise360 original lesson content. Teaching examples support OCR J277 Topic 2.5. The low-level instruction model is explanatory enrichment, not an additional required instruction set.</a:t>
+              <a:t>Revise360 original lesson content. Teaching examples support OCR J277 Topic 2.5. Scope: OCR J277 specification v3.1, May 2026, printed page 21, sections 2.5.1 and 2.5.2. https://www.ocr.org.uk/images/558027-specification-gcse-computer-science-j277.pdf</a:t>
             </a:r>
           </a:p>
         </p:txBody>
@@ -1159,7 +1159,7 @@
           <a:lstStyle xmlns:a="http://schemas.openxmlformats.org/drawingml/2006/main"/>
           <a:p xmlns:a="http://schemas.openxmlformats.org/drawingml/2006/main">
             <a:r>
-              <a:t>Revise360 original lesson content. Teaching examples support OCR J277 Topic 2.5. The low-level instruction model is explanatory enrichment, not an additional required instruction set.</a:t>
+              <a:t>Revise360 original lesson content. Teaching examples support OCR J277 Topic 2.5. Scope: OCR J277 specification v3.1, May 2026, printed page 21, sections 2.5.1 and 2.5.2. https://www.ocr.org.uk/images/558027-specification-gcse-computer-science-j277.pdf</a:t>
             </a:r>
           </a:p>
         </p:txBody>
@@ -1229,7 +1229,7 @@
           <a:lstStyle xmlns:a="http://schemas.openxmlformats.org/drawingml/2006/main"/>
           <a:p xmlns:a="http://schemas.openxmlformats.org/drawingml/2006/main">
             <a:r>
-              <a:t>Revise360 original lesson content. Teaching examples support OCR J277 Topic 2.5. The low-level instruction model is explanatory enrichment, not an additional required instruction set.</a:t>
+              <a:t>Revise360 original lesson content. Teaching examples support OCR J277 Topic 2.5. Scope: OCR J277 specification v3.1, May 2026, printed page 21, sections 2.5.1 and 2.5.2. https://www.ocr.org.uk/images/558027-specification-gcse-computer-science-j277.pdf</a:t>
             </a:r>
           </a:p>
         </p:txBody>
@@ -1299,7 +1299,7 @@
           <a:lstStyle xmlns:a="http://schemas.openxmlformats.org/drawingml/2006/main"/>
           <a:p xmlns:a="http://schemas.openxmlformats.org/drawingml/2006/main">
             <a:r>
-              <a:t>Revise360 original lesson content. Teaching examples support OCR J277 Topic 2.5. The low-level instruction model is explanatory enrichment, not an additional required instruction set.</a:t>
+              <a:t>Revise360 original lesson content. Teaching examples support OCR J277 Topic 2.5. Scope: OCR J277 specification v3.1, May 2026, printed page 21, sections 2.5.1 and 2.5.2. https://www.ocr.org.uk/images/558027-specification-gcse-computer-science-j277.pdf</a:t>
             </a:r>
           </a:p>
         </p:txBody>
@@ -1369,7 +1369,7 @@
           <a:lstStyle xmlns:a="http://schemas.openxmlformats.org/drawingml/2006/main"/>
           <a:p xmlns:a="http://schemas.openxmlformats.org/drawingml/2006/main">
             <a:r>
-              <a:t>Revise360 original lesson content. Teaching examples support OCR J277 Topic 2.5. The low-level instruction model is explanatory enrichment, not an additional required instruction set.</a:t>
+              <a:t>Revise360 original lesson content. Teaching examples support OCR J277 Topic 2.5. Scope: OCR J277 specification v3.1, May 2026, printed page 21, sections 2.5.1 and 2.5.2. https://www.ocr.org.uk/images/558027-specification-gcse-computer-science-j277.pdf</a:t>
             </a:r>
           </a:p>
         </p:txBody>
@@ -1439,7 +1439,7 @@
           <a:lstStyle xmlns:a="http://schemas.openxmlformats.org/drawingml/2006/main"/>
           <a:p xmlns:a="http://schemas.openxmlformats.org/drawingml/2006/main">
             <a:r>
-              <a:t>Revise360 original lesson content. Teaching examples support OCR J277 Topic 2.5. The low-level instruction model is explanatory enrichment, not an additional required instruction set.</a:t>
+              <a:t>Revise360 original lesson content. Teaching examples support OCR J277 Topic 2.5. Scope: OCR J277 specification v3.1, May 2026, printed page 21, sections 2.5.1 and 2.5.2. https://www.ocr.org.uk/images/558027-specification-gcse-computer-science-j277.pdf</a:t>
             </a:r>
           </a:p>
         </p:txBody>
@@ -1509,7 +1509,7 @@
           <a:lstStyle xmlns:a="http://schemas.openxmlformats.org/drawingml/2006/main"/>
           <a:p xmlns:a="http://schemas.openxmlformats.org/drawingml/2006/main">
             <a:r>
-              <a:t>Revise360 original lesson content. Teaching examples support OCR J277 Topic 2.5. The low-level instruction model is explanatory enrichment, not an additional required instruction set.</a:t>
+              <a:t>Revise360 original lesson content. Teaching examples support OCR J277 Topic 2.5. Scope: OCR J277 specification v3.1, May 2026, printed page 21, sections 2.5.1 and 2.5.2. https://www.ocr.org.uk/images/558027-specification-gcse-computer-science-j277.pdf</a:t>
             </a:r>
           </a:p>
         </p:txBody>
@@ -1579,7 +1579,7 @@
           <a:lstStyle xmlns:a="http://schemas.openxmlformats.org/drawingml/2006/main"/>
           <a:p xmlns:a="http://schemas.openxmlformats.org/drawingml/2006/main">
             <a:r>
-              <a:t>Revise360 original lesson content. Teaching examples support OCR J277 Topic 2.5. The low-level instruction model is explanatory enrichment, not an additional required instruction set.</a:t>
+              <a:t>Revise360 original lesson content. Teaching examples support OCR J277 Topic 2.5. Scope: OCR J277 specification v3.1, May 2026, printed page 21, sections 2.5.1 and 2.5.2. https://www.ocr.org.uk/images/558027-specification-gcse-computer-science-j277.pdf</a:t>
             </a:r>
           </a:p>
         </p:txBody>
@@ -1649,7 +1649,7 @@
           <a:lstStyle xmlns:a="http://schemas.openxmlformats.org/drawingml/2006/main"/>
           <a:p xmlns:a="http://schemas.openxmlformats.org/drawingml/2006/main">
             <a:r>
-              <a:t>Revise360 original lesson content. Teaching examples support OCR J277 Topic 2.5. The low-level instruction model is explanatory enrichment, not an additional required instruction set.</a:t>
+              <a:t>Revise360 original lesson content. Teaching examples support OCR J277 Topic 2.5. Scope: OCR J277 specification v3.1, May 2026, printed page 21, sections 2.5.1 and 2.5.2. https://www.ocr.org.uk/images/558027-specification-gcse-computer-science-j277.pdf</a:t>
             </a:r>
           </a:p>
         </p:txBody>
@@ -1717,7 +1717,7 @@
   </p:cSld>
   <p:clrMap bg1="lt1" tx1="dk1" bg2="lt2" tx2="dk2" accent1="accent1" accent2="accent2" accent3="accent3" accent4="accent4" accent5="accent5" accent6="accent6" hlink="hlink" folHlink="folHlink"/>
   <p:sldLayoutIdLst>
-    <p:sldLayoutId xmlns:r="http://schemas.openxmlformats.org/officeDocument/2006/relationships" id="2147483649" r:id="R700937104ff1488e"/>
+    <p:sldLayoutId xmlns:r="http://schemas.openxmlformats.org/officeDocument/2006/relationships" id="2147483649" r:id="R502d7bf389e845de"/>
   </p:sldLayoutIdLst>
   <p:txStyles>
     <p:titleStyle>
@@ -2404,7 +2404,7 @@
                 <a:ea typeface="DejaVu Sans"/>
                 <a:cs typeface="DejaVu Sans"/>
               </a:rPr>
-              <a:t>INSTRUCTION WORKSHOP</a:t>
+              <a:t>LANGUAGE CHOICE WORKSHOP</a:t>
             </a:r>
           </a:p>
         </p:txBody>
@@ -2418,7 +2418,7 @@
           <p:nvPr/>
         </p:nvPicPr>
         <p:blipFill>
-          <a:blip xmlns:r="http://schemas.openxmlformats.org/officeDocument/2006/relationships" xmlns:a="http://schemas.openxmlformats.org/drawingml/2006/main" r:embed="R7fe69b2e88a44840"/>
+          <a:blip xmlns:r="http://schemas.openxmlformats.org/officeDocument/2006/relationships" xmlns:a="http://schemas.openxmlformats.org/drawingml/2006/main" r:embed="R1caae7ce9cb04ed6"/>
           <a:stretch xmlns:a="http://schemas.openxmlformats.org/drawingml/2006/main"/>
         </p:blipFill>
         <p:spPr>
@@ -2542,7 +2542,7 @@
                 <a:ea typeface="DejaVu Sans"/>
                 <a:cs typeface="DejaVu Sans"/>
               </a:rPr>
-              <a:t>Low-level instructions</a:t>
+              <a:t>Language choices</a:t>
             </a:r>
           </a:p>
         </p:txBody>
@@ -2658,7 +2658,7 @@
                 <a:ea typeface="DejaVu Sans"/>
                 <a:cs typeface="DejaVu Sans"/>
               </a:rPr>
-              <a:t>How can a short instruction make a processor change a stored value?</a:t>
+              <a:t>Why might a school app and a small hardware routine need different language choices?</a:t>
             </a:r>
           </a:p>
         </p:txBody>
@@ -2672,7 +2672,7 @@
           <p:nvPr/>
         </p:nvPicPr>
         <p:blipFill>
-          <a:blip xmlns:r="http://schemas.openxmlformats.org/officeDocument/2006/relationships" xmlns:a="http://schemas.openxmlformats.org/drawingml/2006/main" r:embed="R3a119736f480426d"/>
+          <a:blip xmlns:r="http://schemas.openxmlformats.org/officeDocument/2006/relationships" xmlns:a="http://schemas.openxmlformats.org/drawingml/2006/main" r:embed="R9400bf773d80467f"/>
           <a:stretch xmlns:a="http://schemas.openxmlformats.org/drawingml/2006/main"/>
         </p:blipFill>
         <p:spPr>
@@ -2869,7 +2869,7 @@
           <p:nvPr/>
         </p:nvPicPr>
         <p:blipFill>
-          <a:blip xmlns:r="http://schemas.openxmlformats.org/officeDocument/2006/relationships" xmlns:a="http://schemas.openxmlformats.org/drawingml/2006/main" r:embed="R2f229b8f8c9d40ff"/>
+          <a:blip xmlns:r="http://schemas.openxmlformats.org/officeDocument/2006/relationships" xmlns:a="http://schemas.openxmlformats.org/drawingml/2006/main" r:embed="R3d1354c33b6c44b5"/>
           <a:stretch xmlns:a="http://schemas.openxmlformats.org/drawingml/2006/main"/>
         </p:blipFill>
         <p:spPr>
@@ -3051,7 +3051,7 @@
                 <a:ea typeface="DejaVu Sans"/>
                 <a:cs typeface="DejaVu Sans"/>
               </a:rPr>
-              <a:t>Linking code to hardware</a:t>
+              <a:t>A justified recommendation</a:t>
             </a:r>
           </a:p>
         </p:txBody>
@@ -3109,7 +3109,7 @@
                 <a:ea typeface="DejaVu Sans"/>
                 <a:cs typeface="DejaVu Sans"/>
               </a:rPr>
-              <a:t>Its operations closely match a processor instruction set and expose hardware details.</a:t>
+              <a:t>High-level code is easier to maintain and usually more portable. Each system still needs suitable translation support.</a:t>
             </a:r>
           </a:p>
         </p:txBody>
@@ -3414,7 +3414,7 @@
           <p:nvPr/>
         </p:nvPicPr>
         <p:blipFill>
-          <a:blip xmlns:r="http://schemas.openxmlformats.org/officeDocument/2006/relationships" xmlns:a="http://schemas.openxmlformats.org/drawingml/2006/main" r:embed="Rffea7c2a4f084390"/>
+          <a:blip xmlns:r="http://schemas.openxmlformats.org/officeDocument/2006/relationships" xmlns:a="http://schemas.openxmlformats.org/drawingml/2006/main" r:embed="R8e29af7a19ac4c13"/>
           <a:stretch xmlns:a="http://schemas.openxmlformats.org/drawingml/2006/main"/>
         </p:blipFill>
         <p:spPr>
@@ -3596,7 +3596,7 @@
                 <a:ea typeface="DejaVu Sans"/>
                 <a:cs typeface="DejaVu Sans"/>
               </a:rPr>
-              <a:t>1  The teaching computer</a:t>
+              <a:t>1  Reading and changing code</a:t>
             </a:r>
           </a:p>
         </p:txBody>
@@ -3654,7 +3654,7 @@
                 <a:ea typeface="DejaVu Sans"/>
                 <a:cs typeface="DejaVu Sans"/>
               </a:rPr>
-              <a:t>The accumulator holds the current working value. Memory keeps values that the program can load later.</a:t>
+              <a:t>Readable source is easier to understand, so staff can find and change the relevant parts.</a:t>
             </a:r>
           </a:p>
         </p:txBody>
@@ -3712,7 +3712,7 @@
                 <a:ea typeface="DejaVu Sans"/>
                 <a:cs typeface="DejaVu Sans"/>
               </a:rPr>
-              <a:t>2  Input and output</a:t>
+              <a:t>2  Development time</a:t>
             </a:r>
           </a:p>
         </p:txBody>
@@ -3770,7 +3770,7 @@
                 <a:ea typeface="DejaVu Sans"/>
                 <a:cs typeface="DejaVu Sans"/>
               </a:rPr>
-              <a:t>The output is 9. INP reads it, OUT displays it, then HLT stops the program.</a:t>
+              <a:t>One high-level operation can express work that needs several low-level instructions, reducing the code to write.</a:t>
             </a:r>
           </a:p>
         </p:txBody>
@@ -3828,7 +3828,7 @@
                 <a:ea typeface="DejaVu Sans"/>
                 <a:cs typeface="DejaVu Sans"/>
               </a:rPr>
-              <a:t>3  Keeping a value</a:t>
+              <a:t>3  Moving to another system</a:t>
             </a:r>
           </a:p>
         </p:txBody>
@@ -3886,7 +3886,7 @@
                 <a:ea typeface="DejaVu Sans"/>
                 <a:cs typeface="DejaVu Sans"/>
               </a:rPr>
-              <a:t>ACC contains 8 and BOX contains 8. The later LDA restores the first input from BOX.</a:t>
+              <a:t>Its instructions are closely tied to one processor. Another processor may use a different instruction set.</a:t>
             </a:r>
           </a:p>
         </p:txBody>
@@ -4075,7 +4075,7 @@
           <p:nvPr/>
         </p:nvPicPr>
         <p:blipFill>
-          <a:blip xmlns:r="http://schemas.openxmlformats.org/officeDocument/2006/relationships" xmlns:a="http://schemas.openxmlformats.org/drawingml/2006/main" r:embed="R6ac2de7f47d341af"/>
+          <a:blip xmlns:r="http://schemas.openxmlformats.org/officeDocument/2006/relationships" xmlns:a="http://schemas.openxmlformats.org/drawingml/2006/main" r:embed="Rce1d67edf31b4935"/>
           <a:stretch xmlns:a="http://schemas.openxmlformats.org/drawingml/2006/main"/>
         </p:blipFill>
         <p:spPr>
@@ -4257,7 +4257,7 @@
                 <a:ea typeface="DejaVu Sans"/>
                 <a:cs typeface="DejaVu Sans"/>
               </a:rPr>
-              <a:t>4  Calculating step by step</a:t>
+              <a:t>4  Control of hardware</a:t>
             </a:r>
           </a:p>
         </p:txBody>
@@ -4315,7 +4315,7 @@
                 <a:ea typeface="DejaVu Sans"/>
                 <a:cs typeface="DejaVu Sans"/>
               </a:rPr>
-              <a:t>LDA gives 8. ADD gives 13. SUB gives 11. OUT displays 11.</a:t>
+              <a:t>Its instructions closely match processor operations, allowing the programmer to control hardware in detail.</a:t>
             </a:r>
           </a:p>
         </p:txBody>
@@ -4373,7 +4373,7 @@
                 <a:ea typeface="DejaVu Sans"/>
                 <a:cs typeface="DejaVu Sans"/>
               </a:rPr>
-              <a:t>5  Repairing a program</a:t>
+              <a:t>5  Speed and memory</a:t>
             </a:r>
           </a:p>
         </p:txBody>
@@ -4431,7 +4431,7 @@
                 <a:ea typeface="DejaVu Sans"/>
                 <a:cs typeface="DejaVu Sans"/>
               </a:rPr>
-              <a:t>Insert STA FIRST after the first INP. FIRST then holds 6, so ADD FIRST adds it to the second input 4.</a:t>
+              <a:t>It allows detailed control of memory use, but can take longer to write and maintain.</a:t>
             </a:r>
           </a:p>
         </p:txBody>
@@ -4489,7 +4489,7 @@
                 <a:ea typeface="DejaVu Sans"/>
                 <a:cs typeface="DejaVu Sans"/>
               </a:rPr>
-              <a:t>6  Linking code to hardware</a:t>
+              <a:t>6  A justified recommendation</a:t>
             </a:r>
           </a:p>
         </p:txBody>
@@ -4547,7 +4547,7 @@
                 <a:ea typeface="DejaVu Sans"/>
                 <a:cs typeface="DejaVu Sans"/>
               </a:rPr>
-              <a:t>Its operations closely match a processor instruction set and expose hardware details.</a:t>
+              <a:t>High-level code is easier to maintain and usually more portable. Each system still needs suitable translation support.</a:t>
             </a:r>
           </a:p>
         </p:txBody>
@@ -4736,7 +4736,7 @@
           <p:nvPr/>
         </p:nvPicPr>
         <p:blipFill>
-          <a:blip xmlns:r="http://schemas.openxmlformats.org/officeDocument/2006/relationships" xmlns:a="http://schemas.openxmlformats.org/drawingml/2006/main" r:embed="R6e00f18e11be4041"/>
+          <a:blip xmlns:r="http://schemas.openxmlformats.org/officeDocument/2006/relationships" xmlns:a="http://schemas.openxmlformats.org/drawingml/2006/main" r:embed="Rdcf9a4c1a7774069"/>
           <a:stretch xmlns:a="http://schemas.openxmlformats.org/drawingml/2006/main"/>
         </p:blipFill>
         <p:spPr>
@@ -4976,7 +4976,7 @@
                 <a:ea typeface="DejaVu Sans"/>
                 <a:cs typeface="DejaVu Sans"/>
               </a:rPr>
-              <a:t>After first INP: 7. After STA FIRST: 7. After second INP: 2. After ADD FIRST: 9</a:t>
+              <a:t>Easy weekly updates to a quiz: High-level. Precise processor control: Low-level. Quick development of a school app: High-level. Careful control of a tiny routine’s memory use: Low-level</a:t>
             </a:r>
           </a:p>
           <a:p xmlns:a="http://schemas.openxmlformats.org/drawingml/2006/main">
@@ -5024,7 +5024,7 @@
                 <a:ea typeface="DejaVu Sans"/>
                 <a:cs typeface="DejaVu Sans"/>
               </a:rPr>
-              <a:t>Use 7 and 2, and expect 9</a:t>
+              <a:t>High-level source on a new system: Needs a suitable translator. Low-level source for one processor: May need rewriting for another processor. Detailed low-level routine: Usually takes more effort to maintain</a:t>
             </a:r>
           </a:p>
         </p:txBody>
@@ -5793,7 +5793,7 @@
           <p:nvPr/>
         </p:nvPicPr>
         <p:blipFill>
-          <a:blip xmlns:r="http://schemas.openxmlformats.org/officeDocument/2006/relationships" xmlns:a="http://schemas.openxmlformats.org/drawingml/2006/main" r:embed="R5e91d458c861472e"/>
+          <a:blip xmlns:r="http://schemas.openxmlformats.org/officeDocument/2006/relationships" xmlns:a="http://schemas.openxmlformats.org/drawingml/2006/main" r:embed="R63e131222b3d4f57"/>
           <a:stretch xmlns:a="http://schemas.openxmlformats.org/drawingml/2006/main"/>
         </p:blipFill>
         <p:spPr>
@@ -6033,7 +6033,7 @@
                 <a:ea typeface="DejaVu Sans"/>
                 <a:cs typeface="DejaVu Sans"/>
               </a:rPr>
-              <a:t>Explain the difference between assembly and machine code. [2]</a:t>
+              <a:t>Explain two benefits of a high-level language for an app that needs regular updates on different systems. [4]</a:t>
             </a:r>
           </a:p>
         </p:txBody>
@@ -6149,7 +6149,7 @@
                 <a:ea typeface="DejaVu Sans"/>
                 <a:cs typeface="DejaVu Sans"/>
               </a:rPr>
-              <a:t>A program reads two inputs into one accumulator. Explain why it must store the first before reading the second if it needs both. [2]</a:t>
+              <a:t>A small routine needs precise hardware control. Explain one benefit and one drawback of low-level code. [4]</a:t>
             </a:r>
           </a:p>
         </p:txBody>
@@ -6338,7 +6338,7 @@
           <p:nvPr/>
         </p:nvPicPr>
         <p:blipFill>
-          <a:blip xmlns:r="http://schemas.openxmlformats.org/officeDocument/2006/relationships" xmlns:a="http://schemas.openxmlformats.org/drawingml/2006/main" r:embed="R3fa934c54dec4985"/>
+          <a:blip xmlns:r="http://schemas.openxmlformats.org/officeDocument/2006/relationships" xmlns:a="http://schemas.openxmlformats.org/drawingml/2006/main" r:embed="R3cbfd52481074610"/>
           <a:stretch xmlns:a="http://schemas.openxmlformats.org/drawingml/2006/main"/>
         </p:blipFill>
         <p:spPr>
@@ -6578,7 +6578,7 @@
                 <a:ea typeface="DejaVu Sans"/>
                 <a:cs typeface="DejaVu Sans"/>
               </a:rPr>
-              <a:t>Trace LDA X, ADD Y, SUB Z, OUT for X = 9, Y = 4 and Z = 3. Give the intermediate values and output. [4]</a:t>
+              <a:t>Explain why portable high-level source still needs translation. [2]</a:t>
             </a:r>
           </a:p>
         </p:txBody>
@@ -6825,7 +6825,7 @@
           <p:nvPr/>
         </p:nvPicPr>
         <p:blipFill>
-          <a:blip xmlns:r="http://schemas.openxmlformats.org/officeDocument/2006/relationships" xmlns:a="http://schemas.openxmlformats.org/drawingml/2006/main" r:embed="R6a4458f98aa24650"/>
+          <a:blip xmlns:r="http://schemas.openxmlformats.org/officeDocument/2006/relationships" xmlns:a="http://schemas.openxmlformats.org/drawingml/2006/main" r:embed="R517ed05c63f7498f"/>
           <a:stretch xmlns:a="http://schemas.openxmlformats.org/drawingml/2006/main"/>
         </p:blipFill>
         <p:spPr>
@@ -7007,7 +7007,7 @@
                 <a:ea typeface="DejaVu Sans"/>
                 <a:cs typeface="DejaVu Sans"/>
               </a:rPr>
-              <a:t>a  Assembly uses mnemonic instruction names. Machine code uses binary instructions a compatible CPU executes.</a:t>
+              <a:t>a  Readable source is easier to understand. This makes regular changes easier. High-level source is usually more portable. It can be used on different systems with suitable translators.</a:t>
             </a:r>
           </a:p>
         </p:txBody>
@@ -7065,7 +7065,7 @@
                 <a:ea typeface="DejaVu Sans"/>
                 <a:cs typeface="DejaVu Sans"/>
               </a:rPr>
-              <a:t>b  The second input replaces the accumulator value. Storing the first preserves it for later use.</a:t>
+              <a:t>b  Its instructions closely match processor operations. This allows detailed hardware control. It requires more knowledge of the processor. This can increase development effort.</a:t>
             </a:r>
           </a:p>
         </p:txBody>
@@ -7254,7 +7254,7 @@
           <p:nvPr/>
         </p:nvPicPr>
         <p:blipFill>
-          <a:blip xmlns:r="http://schemas.openxmlformats.org/officeDocument/2006/relationships" xmlns:a="http://schemas.openxmlformats.org/drawingml/2006/main" r:embed="R4370d8516f244ddd"/>
+          <a:blip xmlns:r="http://schemas.openxmlformats.org/officeDocument/2006/relationships" xmlns:a="http://schemas.openxmlformats.org/drawingml/2006/main" r:embed="Re21cf4fc8b0a4303"/>
           <a:stretch xmlns:a="http://schemas.openxmlformats.org/drawingml/2006/main"/>
         </p:blipFill>
         <p:spPr>
@@ -7494,7 +7494,7 @@
                 <a:ea typeface="DejaVu Sans"/>
                 <a:cs typeface="DejaVu Sans"/>
               </a:rPr>
-              <a:t>After LDA X: 9.</a:t>
+              <a:t>A CPU cannot execute high-level source directly.</a:t>
             </a:r>
           </a:p>
         </p:txBody>
@@ -7610,7 +7610,7 @@
                 <a:ea typeface="DejaVu Sans"/>
                 <a:cs typeface="DejaVu Sans"/>
               </a:rPr>
-              <a:t>After ADD Y: 13.</a:t>
+              <a:t>A suitable translator enables its instructions to be executed.</a:t>
             </a:r>
           </a:p>
         </p:txBody>
@@ -7648,7 +7648,7 @@
           </a:bodyPr>
           <a:lstStyle xmlns:a="http://schemas.openxmlformats.org/drawingml/2006/main"/>
           <a:p xmlns:a="http://schemas.openxmlformats.org/drawingml/2006/main">
-            <a:pPr algn="l">
+            <a:pPr>
               <a:buNone/>
               <a:defRPr sz="1950" b="1">
                 <a:solidFill>
@@ -7668,7 +7668,7 @@
                 <a:ea typeface="DejaVu Sans"/>
                 <a:cs typeface="DejaVu Sans"/>
               </a:rPr>
-              <a:t>3.</a:t>
+              <a:t/>
             </a:r>
           </a:p>
         </p:txBody>
@@ -7706,7 +7706,7 @@
           </a:bodyPr>
           <a:lstStyle xmlns:a="http://schemas.openxmlformats.org/drawingml/2006/main"/>
           <a:p xmlns:a="http://schemas.openxmlformats.org/drawingml/2006/main">
-            <a:pPr algn="l">
+            <a:pPr>
               <a:buNone/>
               <a:defRPr sz="1950" b="0">
                 <a:solidFill>
@@ -7726,7 +7726,7 @@
                 <a:ea typeface="DejaVu Sans"/>
                 <a:cs typeface="DejaVu Sans"/>
               </a:rPr>
-              <a:t>After SUB Z: 10. OUT displays 10.</a:t>
+              <a:t/>
             </a:r>
           </a:p>
         </p:txBody>
@@ -7915,7 +7915,7 @@
           <p:nvPr/>
         </p:nvPicPr>
         <p:blipFill>
-          <a:blip xmlns:r="http://schemas.openxmlformats.org/officeDocument/2006/relationships" xmlns:a="http://schemas.openxmlformats.org/drawingml/2006/main" r:embed="Re9927835ac1640f3"/>
+          <a:blip xmlns:r="http://schemas.openxmlformats.org/officeDocument/2006/relationships" xmlns:a="http://schemas.openxmlformats.org/drawingml/2006/main" r:embed="R28406151e2e64e12"/>
           <a:stretch xmlns:a="http://schemas.openxmlformats.org/drawingml/2006/main"/>
         </p:blipFill>
         <p:spPr>
@@ -8155,7 +8155,7 @@
                 <a:ea typeface="DejaVu Sans"/>
                 <a:cs typeface="DejaVu Sans"/>
               </a:rPr>
-              <a:t>Compare assembly with machine code.</a:t>
+              <a:t>Compare development effort at different language levels.</a:t>
             </a:r>
           </a:p>
         </p:txBody>
@@ -8271,7 +8271,7 @@
                 <a:ea typeface="DejaVu Sans"/>
                 <a:cs typeface="DejaVu Sans"/>
               </a:rPr>
-              <a:t>Trace simple input, storage and calculation instructions.</a:t>
+              <a:t>Explain portability and hardware control.</a:t>
             </a:r>
           </a:p>
         </p:txBody>
@@ -8387,7 +8387,7 @@
                 <a:ea typeface="DejaVu Sans"/>
                 <a:cs typeface="DejaVu Sans"/>
               </a:rPr>
-              <a:t>Explain why instruction order matters.</a:t>
+              <a:t>Justify language choices using project requirements.</a:t>
             </a:r>
           </a:p>
         </p:txBody>
@@ -8692,7 +8692,7 @@
           <p:nvPr/>
         </p:nvPicPr>
         <p:blipFill>
-          <a:blip xmlns:r="http://schemas.openxmlformats.org/officeDocument/2006/relationships" xmlns:a="http://schemas.openxmlformats.org/drawingml/2006/main" r:embed="Rd5cd5c7791024d70"/>
+          <a:blip xmlns:r="http://schemas.openxmlformats.org/officeDocument/2006/relationships" xmlns:a="http://schemas.openxmlformats.org/drawingml/2006/main" r:embed="Rc5aeebd0a6764d03"/>
           <a:stretch xmlns:a="http://schemas.openxmlformats.org/drawingml/2006/main"/>
         </p:blipFill>
         <p:spPr>
@@ -8874,7 +8874,7 @@
                 <a:ea typeface="DejaVu Sans"/>
                 <a:cs typeface="DejaVu Sans"/>
               </a:rPr>
-              <a:t>Compare assembly with machine code.</a:t>
+              <a:t>Compare development effort at different language levels.</a:t>
             </a:r>
           </a:p>
         </p:txBody>
@@ -8990,7 +8990,7 @@
                 <a:ea typeface="DejaVu Sans"/>
                 <a:cs typeface="DejaVu Sans"/>
               </a:rPr>
-              <a:t>Trace simple input, storage and calculation instructions.</a:t>
+              <a:t>Explain portability and hardware control.</a:t>
             </a:r>
           </a:p>
         </p:txBody>
@@ -9106,7 +9106,7 @@
                 <a:ea typeface="DejaVu Sans"/>
                 <a:cs typeface="DejaVu Sans"/>
               </a:rPr>
-              <a:t>Explain why instruction order matters.</a:t>
+              <a:t>Justify language choices using project requirements.</a:t>
             </a:r>
           </a:p>
         </p:txBody>
@@ -9411,7 +9411,7 @@
           <p:nvPr/>
         </p:nvPicPr>
         <p:blipFill>
-          <a:blip xmlns:r="http://schemas.openxmlformats.org/officeDocument/2006/relationships" xmlns:a="http://schemas.openxmlformats.org/drawingml/2006/main" r:embed="R33dffc4a5e8c49fb"/>
+          <a:blip xmlns:r="http://schemas.openxmlformats.org/officeDocument/2006/relationships" xmlns:a="http://schemas.openxmlformats.org/drawingml/2006/main" r:embed="R33c92dded5b94804"/>
           <a:stretch xmlns:a="http://schemas.openxmlformats.org/drawingml/2006/main"/>
         </p:blipFill>
         <p:spPr>
@@ -9535,7 +9535,7 @@
                 <a:ea typeface="DejaVu Sans"/>
                 <a:cs typeface="DejaVu Sans"/>
               </a:rPr>
-              <a:t>A box contains 6. Add 5, store the result, then subtract 2. What is in the box before and after the subtraction?</a:t>
+              <a:t>Which is usually easier for a person to understand: high-level source or binary machine code? Give a reason.</a:t>
             </a:r>
           </a:p>
         </p:txBody>
@@ -9724,7 +9724,7 @@
           <p:nvPr/>
         </p:nvPicPr>
         <p:blipFill>
-          <a:blip xmlns:r="http://schemas.openxmlformats.org/officeDocument/2006/relationships" xmlns:a="http://schemas.openxmlformats.org/drawingml/2006/main" r:embed="Ra192e28233fd43b4"/>
+          <a:blip xmlns:r="http://schemas.openxmlformats.org/officeDocument/2006/relationships" xmlns:a="http://schemas.openxmlformats.org/drawingml/2006/main" r:embed="R0741b8237cdf48fa"/>
           <a:stretch xmlns:a="http://schemas.openxmlformats.org/drawingml/2006/main"/>
         </p:blipFill>
         <p:spPr>
@@ -9906,7 +9906,7 @@
                 <a:ea typeface="DejaVu Sans"/>
                 <a:cs typeface="DejaVu Sans"/>
               </a:rPr>
-              <a:t>Before subtraction: 11. After subtraction: 9. Each instruction uses the result left by the previous one.</a:t>
+              <a:t>High-level source uses readable words and familiar operations. Binary machine code is harder for people to interpret.</a:t>
             </a:r>
           </a:p>
         </p:txBody>
@@ -10211,7 +10211,7 @@
           <p:nvPr/>
         </p:nvPicPr>
         <p:blipFill>
-          <a:blip xmlns:r="http://schemas.openxmlformats.org/officeDocument/2006/relationships" xmlns:a="http://schemas.openxmlformats.org/drawingml/2006/main" r:embed="R0a1ccd0ac67e4cd9"/>
+          <a:blip xmlns:r="http://schemas.openxmlformats.org/officeDocument/2006/relationships" xmlns:a="http://schemas.openxmlformats.org/drawingml/2006/main" r:embed="Rd4efb9cf41384a68"/>
           <a:stretch xmlns:a="http://schemas.openxmlformats.org/drawingml/2006/main"/>
         </p:blipFill>
         <p:spPr>
@@ -10393,7 +10393,7 @@
                 <a:ea typeface="DejaVu Sans"/>
                 <a:cs typeface="DejaVu Sans"/>
               </a:rPr>
-              <a:t>Mnemonic</a:t>
+              <a:t>Portability</a:t>
             </a:r>
           </a:p>
         </p:txBody>
@@ -10509,7 +10509,7 @@
                 <a:ea typeface="DejaVu Sans"/>
                 <a:cs typeface="DejaVu Sans"/>
               </a:rPr>
-              <a:t>Accumulator</a:t>
+              <a:t>Maintainability</a:t>
             </a:r>
           </a:p>
         </p:txBody>
@@ -10698,7 +10698,7 @@
           <p:nvPr/>
         </p:nvPicPr>
         <p:blipFill>
-          <a:blip xmlns:r="http://schemas.openxmlformats.org/officeDocument/2006/relationships" xmlns:a="http://schemas.openxmlformats.org/drawingml/2006/main" r:embed="R0292b26c60444265"/>
+          <a:blip xmlns:r="http://schemas.openxmlformats.org/officeDocument/2006/relationships" xmlns:a="http://schemas.openxmlformats.org/drawingml/2006/main" r:embed="Rbbbf3b955fd14a69"/>
           <a:stretch xmlns:a="http://schemas.openxmlformats.org/drawingml/2006/main"/>
         </p:blipFill>
         <p:spPr>
@@ -10822,7 +10822,7 @@
                 <a:ea typeface="DejaVu Sans"/>
                 <a:cs typeface="DejaVu Sans"/>
               </a:rPr>
-              <a:t>Mnemonic</a:t>
+              <a:t>Portability</a:t>
             </a:r>
           </a:p>
         </p:txBody>
@@ -10880,7 +10880,7 @@
                 <a:ea typeface="DejaVu Sans"/>
                 <a:cs typeface="DejaVu Sans"/>
               </a:rPr>
-              <a:t>A short name that represents an instruction, such as ADD.</a:t>
+              <a:t>How readily a program can be used on another computer system.</a:t>
             </a:r>
           </a:p>
         </p:txBody>
@@ -10938,7 +10938,7 @@
                 <a:ea typeface="DejaVu Sans"/>
                 <a:cs typeface="DejaVu Sans"/>
               </a:rPr>
-              <a:t>Accumulator</a:t>
+              <a:t>Maintainability</a:t>
             </a:r>
           </a:p>
         </p:txBody>
@@ -10996,7 +10996,7 @@
                 <a:ea typeface="DejaVu Sans"/>
                 <a:cs typeface="DejaVu Sans"/>
               </a:rPr>
-              <a:t>A register that holds a value being processed in this teaching computer.</a:t>
+              <a:t>How easily programmers can understand and change a program.</a:t>
             </a:r>
           </a:p>
         </p:txBody>
@@ -11185,7 +11185,7 @@
           <p:nvPr/>
         </p:nvPicPr>
         <p:blipFill>
-          <a:blip xmlns:r="http://schemas.openxmlformats.org/officeDocument/2006/relationships" xmlns:a="http://schemas.openxmlformats.org/drawingml/2006/main" r:embed="R5aa4330022804e16"/>
+          <a:blip xmlns:r="http://schemas.openxmlformats.org/officeDocument/2006/relationships" xmlns:a="http://schemas.openxmlformats.org/drawingml/2006/main" r:embed="R5e66e4b2edfa4d0a"/>
           <a:stretch xmlns:a="http://schemas.openxmlformats.org/drawingml/2006/main"/>
         </p:blipFill>
         <p:spPr>
@@ -11367,7 +11367,7 @@
                 <a:ea typeface="DejaVu Sans"/>
                 <a:cs typeface="DejaVu Sans"/>
               </a:rPr>
-              <a:t>Open Instruction workshop in Topic 2.5. Keep the worksheet beside you.</a:t>
+              <a:t>Open Language choice workshop in Topic 2.5. Keep the worksheet beside you.</a:t>
             </a:r>
           </a:p>
         </p:txBody>
@@ -11904,7 +11904,7 @@
           <p:nvPr/>
         </p:nvPicPr>
         <p:blipFill>
-          <a:blip xmlns:r="http://schemas.openxmlformats.org/officeDocument/2006/relationships" xmlns:a="http://schemas.openxmlformats.org/drawingml/2006/main" r:embed="R0a7f6d5c86304876"/>
+          <a:blip xmlns:r="http://schemas.openxmlformats.org/officeDocument/2006/relationships" xmlns:a="http://schemas.openxmlformats.org/drawingml/2006/main" r:embed="R4b488c2df81145fe"/>
           <a:stretch xmlns:a="http://schemas.openxmlformats.org/drawingml/2006/main"/>
         </p:blipFill>
         <p:spPr>
@@ -12275,7 +12275,7 @@
           <p:nvPr/>
         </p:nvPicPr>
         <p:blipFill>
-          <a:blip xmlns:r="http://schemas.openxmlformats.org/officeDocument/2006/relationships" xmlns:a="http://schemas.openxmlformats.org/drawingml/2006/main" r:embed="R888bc9424f624493"/>
+          <a:blip xmlns:r="http://schemas.openxmlformats.org/officeDocument/2006/relationships" xmlns:a="http://schemas.openxmlformats.org/drawingml/2006/main" r:embed="R89c6284ccd6c4ff7"/>
           <a:stretch xmlns:a="http://schemas.openxmlformats.org/drawingml/2006/main"/>
         </p:blipFill>
         <p:spPr>
